--- a/lecons/LSA/Climatology/LSA_CLIM_L15_Planetary_Winds.pptx
+++ b/lecons/LSA/Climatology/LSA_CLIM_L15_Planetary_Winds.pptx
@@ -2932,7 +2932,7 @@
           <a:p>
             <a:r>
               <a:rPr lang="en-US" dirty="0"/>
-              <a:t>Let us copy Meaning and Illustration. The main terms are defined as follows. Write each point on a new line, with the key term first. When you finish, we go to the next slide.</a:t>
+              <a:t>Let us copy Meaning and Illustration. The main terms are defined as follows. On this slide we have Wind. Write each point on a new line, with the key term first, and explain it in your own words when we revise. When you finish, we go to the next slide.</a:t>
             </a:r>
             <a:endParaRPr lang="en-US" dirty="0"/>
           </a:p>
@@ -3020,7 +3020,7 @@
           <a:p>
             <a:r>
               <a:rPr lang="en-US" dirty="0"/>
-              <a:t>We continue with the same part. Write each point on a new line, with the key term first.</a:t>
+              <a:t>We continue with Meaning and Illustration. On this slide we have Planetary (permanent) winds. Write each point on a new line, with the key term first, and explain it in your own words when we revise.</a:t>
             </a:r>
             <a:endParaRPr lang="en-US" dirty="0"/>
           </a:p>
@@ -3108,7 +3108,7 @@
           <a:p>
             <a:r>
               <a:rPr lang="en-US" dirty="0"/>
-              <a:t>Let us copy Illustration. The planetary winds blow between the pressure belts. Write each point on a new line, with the key term first.</a:t>
+              <a:t>Let us copy Illustration. The planetary winds blow between the pressure belts. On this slide we have Coriolis force. Write each point on a new line, with the key term first, and explain it in your own words when we revise.</a:t>
             </a:r>
             <a:endParaRPr lang="en-US" dirty="0"/>
           </a:p>
@@ -3284,7 +3284,7 @@
           <a:p>
             <a:r>
               <a:rPr lang="en-US" dirty="0"/>
-              <a:t>Let us copy Types and Characteristics. There are three types of planetary winds. Write each point on a new line, with the key term first. When you finish, we go to the next slide.</a:t>
+              <a:t>Let us copy Types and Characteristics. There are three types of planetary winds. On this slide we have Trade winds. Write each point on a new line, with the key term first, and explain it in your own words when we revise. When you finish, we go to the next slide.</a:t>
             </a:r>
             <a:endParaRPr lang="en-US" dirty="0"/>
           </a:p>
@@ -3372,7 +3372,7 @@
           <a:p>
             <a:r>
               <a:rPr lang="en-US" dirty="0"/>
-              <a:t>We continue with the same part. Write each point on a new line, with the key term first. When you finish, we go to the next slide.</a:t>
+              <a:t>We continue with Types and Characteristics. On this slide we have Westerlies. Write each point on a new line, with the key term first, and explain it in your own words when we revise. When you finish, we go to the next slide.</a:t>
             </a:r>
             <a:endParaRPr lang="en-US" dirty="0"/>
           </a:p>
@@ -3548,7 +3548,7 @@
           <a:p>
             <a:r>
               <a:rPr lang="en-US" dirty="0"/>
-              <a:t>We continue with the same part. Write each point on a new line, with the key term first.</a:t>
+              <a:t>We continue with Types and Characteristics. On this slide we have Polar easterlies. Write each point on a new line, with the key term first, and explain it in your own words when we revise.</a:t>
             </a:r>
             <a:endParaRPr lang="en-US" dirty="0"/>
           </a:p>
@@ -3636,7 +3636,7 @@
           <a:p>
             <a:r>
               <a:rPr lang="en-US" dirty="0"/>
-              <a:t>Let us copy Characteristics. The characteristics of each type are. Write each point on a new line, with the key term first. When you finish, we go to the next slide.</a:t>
+              <a:t>Let us copy Characteristics. The characteristics of each type are. On this slide we have Trade winds. Write each point on a new line, with the key term first, and explain it in your own words when we revise. When you finish, we go to the next slide.</a:t>
             </a:r>
             <a:endParaRPr lang="en-US" dirty="0"/>
           </a:p>
@@ -3724,7 +3724,7 @@
           <a:p>
             <a:r>
               <a:rPr lang="en-US" dirty="0"/>
-              <a:t>We continue with the same part. Write each point on a new line, with the key term first. When you finish, we go to the next slide.</a:t>
+              <a:t>We continue with Characteristics. On this slide we have Westerlies. Write each point on a new line, with the key term first, and explain it in your own words when we revise. When you finish, we go to the next slide.</a:t>
             </a:r>
             <a:endParaRPr lang="en-US" dirty="0"/>
           </a:p>
@@ -3812,7 +3812,7 @@
           <a:p>
             <a:r>
               <a:rPr lang="en-US" dirty="0"/>
-              <a:t>We continue with the same part. Write each point on a new line, with the key term first.</a:t>
+              <a:t>We continue with Characteristics. On this slide we have Polar easterlies. Write each point on a new line, with the key term first, and explain it in your own words when we revise.</a:t>
             </a:r>
             <a:endParaRPr lang="en-US" dirty="0"/>
           </a:p>
@@ -5044,7 +5044,7 @@
           <a:p>
             <a:r>
               <a:rPr lang="en-US" dirty="0"/>
-              <a:t>Here is the plan of our lesson today. We shall correction of the homework; then objectives and recall; then real-life situation and action to take; then learning activities; then board summary; then evaluation, remediation and homework.</a:t>
+              <a:t>Here is the plan of our lesson today. First, we shall correct the homework. Then we shall look at the objectives and recall what you already know. After that, we shall study a situation from real life and the action to take, and do the learning activities. Finally, we shall copy the board summary, do the evaluation and the remediation, and I will give you the homework.</a:t>
             </a:r>
             <a:endParaRPr lang="en-US" dirty="0"/>
           </a:p>
@@ -6584,7 +6584,7 @@
                 <a:ea typeface="Times New Roman" pitchFamily="34" charset="-122"/>
                 <a:cs typeface="Times New Roman" pitchFamily="34" charset="-120"/>
               </a:rPr>
-              <a:t>Lesson 15: Planetary Winds</a:t>
+              <a:t>Lesson 15</a:t>
             </a:r>
             <a:endParaRPr lang="en-US" sz="2600" dirty="0"/>
           </a:p>
